--- a/GenAI/wk4-embedding-vectorDB-SemanticSearch/x_llamaindex/1_llamaindex.pptx
+++ b/GenAI/wk4-embedding-vectorDB-SemanticSearch/x_llamaindex/1_llamaindex.pptx
@@ -223,7 +223,7 @@
           <a:p>
             <a:fld id="{7BAEECA8-D063-486F-AE31-5020270C1449}" type="datetimeFigureOut">
               <a:rPr lang="en-US" smtClean="0"/>
-              <a:t>6/3/2026</a:t>
+              <a:t>6/15/2026</a:t>
             </a:fld>
             <a:endParaRPr lang="en-US"/>
           </a:p>
@@ -1424,7 +1424,7 @@
           <a:p>
             <a:fld id="{CB233BD1-3BA8-448D-9D08-7846095EA517}" type="datetimeFigureOut">
               <a:rPr lang="en-US" smtClean="0"/>
-              <a:t>6/3/2026</a:t>
+              <a:t>6/15/2026</a:t>
             </a:fld>
             <a:endParaRPr lang="en-US"/>
           </a:p>
@@ -1838,7 +1838,7 @@
           <a:p>
             <a:fld id="{6383FAE1-13DE-4511-8C1B-C8AFB720664C}" type="datetimeFigureOut">
               <a:rPr lang="en-US" smtClean="0"/>
-              <a:t>6/3/2026</a:t>
+              <a:t>6/15/2026</a:t>
             </a:fld>
             <a:endParaRPr lang="en-US"/>
           </a:p>
@@ -2036,7 +2036,7 @@
           <a:p>
             <a:fld id="{6383FAE1-13DE-4511-8C1B-C8AFB720664C}" type="datetimeFigureOut">
               <a:rPr lang="en-US" smtClean="0"/>
-              <a:t>6/3/2026</a:t>
+              <a:t>6/15/2026</a:t>
             </a:fld>
             <a:endParaRPr lang="en-US"/>
           </a:p>
@@ -2244,7 +2244,7 @@
           <a:p>
             <a:fld id="{6383FAE1-13DE-4511-8C1B-C8AFB720664C}" type="datetimeFigureOut">
               <a:rPr lang="en-US" smtClean="0"/>
-              <a:t>6/3/2026</a:t>
+              <a:t>6/15/2026</a:t>
             </a:fld>
             <a:endParaRPr lang="en-US"/>
           </a:p>
@@ -2442,7 +2442,7 @@
           <a:p>
             <a:fld id="{6383FAE1-13DE-4511-8C1B-C8AFB720664C}" type="datetimeFigureOut">
               <a:rPr lang="en-US" smtClean="0"/>
-              <a:t>6/3/2026</a:t>
+              <a:t>6/15/2026</a:t>
             </a:fld>
             <a:endParaRPr lang="en-US"/>
           </a:p>
@@ -2717,7 +2717,7 @@
           <a:p>
             <a:fld id="{6383FAE1-13DE-4511-8C1B-C8AFB720664C}" type="datetimeFigureOut">
               <a:rPr lang="en-US" smtClean="0"/>
-              <a:t>6/3/2026</a:t>
+              <a:t>6/15/2026</a:t>
             </a:fld>
             <a:endParaRPr lang="en-US"/>
           </a:p>
@@ -2982,7 +2982,7 @@
           <a:p>
             <a:fld id="{6383FAE1-13DE-4511-8C1B-C8AFB720664C}" type="datetimeFigureOut">
               <a:rPr lang="en-US" smtClean="0"/>
-              <a:t>6/3/2026</a:t>
+              <a:t>6/15/2026</a:t>
             </a:fld>
             <a:endParaRPr lang="en-US"/>
           </a:p>
@@ -3394,7 +3394,7 @@
           <a:p>
             <a:fld id="{6383FAE1-13DE-4511-8C1B-C8AFB720664C}" type="datetimeFigureOut">
               <a:rPr lang="en-US" smtClean="0"/>
-              <a:t>6/3/2026</a:t>
+              <a:t>6/15/2026</a:t>
             </a:fld>
             <a:endParaRPr lang="en-US"/>
           </a:p>
@@ -3535,7 +3535,7 @@
           <a:p>
             <a:fld id="{6383FAE1-13DE-4511-8C1B-C8AFB720664C}" type="datetimeFigureOut">
               <a:rPr lang="en-US" smtClean="0"/>
-              <a:t>6/3/2026</a:t>
+              <a:t>6/15/2026</a:t>
             </a:fld>
             <a:endParaRPr lang="en-US"/>
           </a:p>
@@ -3648,7 +3648,7 @@
           <a:p>
             <a:fld id="{6383FAE1-13DE-4511-8C1B-C8AFB720664C}" type="datetimeFigureOut">
               <a:rPr lang="en-US" smtClean="0"/>
-              <a:t>6/3/2026</a:t>
+              <a:t>6/15/2026</a:t>
             </a:fld>
             <a:endParaRPr lang="en-US"/>
           </a:p>
@@ -3959,7 +3959,7 @@
           <a:p>
             <a:fld id="{6383FAE1-13DE-4511-8C1B-C8AFB720664C}" type="datetimeFigureOut">
               <a:rPr lang="en-US" smtClean="0"/>
-              <a:t>6/3/2026</a:t>
+              <a:t>6/15/2026</a:t>
             </a:fld>
             <a:endParaRPr lang="en-US"/>
           </a:p>
@@ -4250,7 +4250,7 @@
           <a:p>
             <a:fld id="{6383FAE1-13DE-4511-8C1B-C8AFB720664C}" type="datetimeFigureOut">
               <a:rPr lang="en-US" smtClean="0"/>
-              <a:t>6/3/2026</a:t>
+              <a:t>6/15/2026</a:t>
             </a:fld>
             <a:endParaRPr lang="en-US"/>
           </a:p>
@@ -4494,7 +4494,7 @@
           <a:p>
             <a:fld id="{6383FAE1-13DE-4511-8C1B-C8AFB720664C}" type="datetimeFigureOut">
               <a:rPr lang="en-US" smtClean="0"/>
-              <a:t>6/3/2026</a:t>
+              <a:t>6/15/2026</a:t>
             </a:fld>
             <a:endParaRPr lang="en-US"/>
           </a:p>
@@ -5123,29 +5123,7 @@
                   </a:schemeClr>
                 </a:solidFill>
               </a:rPr>
-              <a:t>What is </a:t>
-            </a:r>
-            <a:r>
-              <a:rPr lang="en-US" sz="2400" b="1" dirty="0" err="1">
-                <a:solidFill>
-                  <a:schemeClr val="accent6">
-                    <a:lumMod val="60000"/>
-                    <a:lumOff val="40000"/>
-                  </a:schemeClr>
-                </a:solidFill>
-              </a:rPr>
-              <a:t>LlamaIndex</a:t>
-            </a:r>
-            <a:r>
-              <a:rPr lang="en-US" sz="2400" b="1" dirty="0">
-                <a:solidFill>
-                  <a:schemeClr val="accent6">
-                    <a:lumMod val="60000"/>
-                    <a:lumOff val="40000"/>
-                  </a:schemeClr>
-                </a:solidFill>
-              </a:rPr>
-              <a:t>?</a:t>
+              <a:t>What is LlamaIndex?</a:t>
             </a:r>
           </a:p>
           <a:p>
@@ -5163,17 +5141,6 @@
           </a:p>
           <a:p>
             <a:r>
-              <a:rPr lang="en-US" sz="2400" dirty="0" err="1">
-                <a:solidFill>
-                  <a:schemeClr val="accent6">
-                    <a:lumMod val="60000"/>
-                    <a:lumOff val="40000"/>
-                  </a:schemeClr>
-                </a:solidFill>
-              </a:rPr>
-              <a:t>LlamaIndex</a:t>
-            </a:r>
-            <a:r>
               <a:rPr lang="en-US" sz="2400" dirty="0">
                 <a:solidFill>
                   <a:schemeClr val="accent6">
@@ -5182,7 +5149,7 @@
                   </a:schemeClr>
                 </a:solidFill>
               </a:rPr>
-              <a:t> is a Python framework designed to connect Large Language Models (LLMs) to your own data. </a:t>
+              <a:t>LlamaIndex is a Python framework designed to connect Large Language Models (LLMs) to your own data. </a:t>
             </a:r>
           </a:p>
           <a:p>
@@ -5218,29 +5185,7 @@
                   </a:schemeClr>
                 </a:solidFill>
               </a:rPr>
-              <a:t>At its core, </a:t>
-            </a:r>
-            <a:r>
-              <a:rPr lang="en-US" sz="2400" dirty="0" err="1">
-                <a:solidFill>
-                  <a:schemeClr val="accent6">
-                    <a:lumMod val="60000"/>
-                    <a:lumOff val="40000"/>
-                  </a:schemeClr>
-                </a:solidFill>
-              </a:rPr>
-              <a:t>LlamaIndex</a:t>
-            </a:r>
-            <a:r>
-              <a:rPr lang="en-US" sz="2400" dirty="0">
-                <a:solidFill>
-                  <a:schemeClr val="accent6">
-                    <a:lumMod val="60000"/>
-                    <a:lumOff val="40000"/>
-                  </a:schemeClr>
-                </a:solidFill>
-              </a:rPr>
-              <a:t> solves one fundamental problem: </a:t>
+              <a:t>At its core, LlamaIndex solves one fundamental problem: </a:t>
             </a:r>
           </a:p>
           <a:p>
@@ -5311,7 +5256,7 @@
         <p:spPr>
           <a:xfrm>
             <a:off x="6483127" y="2309356"/>
-            <a:ext cx="1725788" cy="1119140"/>
+            <a:ext cx="2030554" cy="1119140"/>
           </a:xfrm>
           <a:prstGeom prst="ellipse">
             <a:avLst/>
@@ -5340,8 +5285,20 @@
             <a:pPr algn="ctr"/>
             <a:r>
               <a:rPr lang="en-US" dirty="0"/>
-              <a:t>Personal File</a:t>
-            </a:r>
+              <a:t>Personal File:</a:t>
+            </a:r>
+          </a:p>
+          <a:p>
+            <a:pPr algn="ctr"/>
+            <a:r>
+              <a:rPr lang="en-US" dirty="0"/>
+              <a:t>PDF, DB, Excel, </a:t>
+            </a:r>
+            <a:r>
+              <a:rPr lang="en-US" dirty="0" err="1"/>
+              <a:t>etc</a:t>
+            </a:r>
+            <a:endParaRPr lang="en-US" dirty="0"/>
           </a:p>
         </p:txBody>
       </p:sp>
@@ -5483,7 +5440,7 @@
         <p:spPr>
           <a:xfrm>
             <a:off x="7871324" y="3703896"/>
-            <a:ext cx="1203919" cy="369332"/>
+            <a:ext cx="1232645" cy="369332"/>
           </a:xfrm>
           <a:prstGeom prst="rect">
             <a:avLst/>
@@ -5497,7 +5454,7 @@
           <a:lstStyle/>
           <a:p>
             <a:r>
-              <a:rPr lang="en-US" dirty="0" err="1">
+              <a:rPr lang="en-US" b="1" dirty="0">
                 <a:solidFill>
                   <a:schemeClr val="accent6">
                     <a:lumMod val="60000"/>
@@ -5507,14 +5464,6 @@
               </a:rPr>
               <a:t>llamaindex</a:t>
             </a:r>
-            <a:endParaRPr lang="en-US" dirty="0">
-              <a:solidFill>
-                <a:schemeClr val="accent6">
-                  <a:lumMod val="60000"/>
-                  <a:lumOff val="40000"/>
-                </a:schemeClr>
-              </a:solidFill>
-            </a:endParaRPr>
           </a:p>
         </p:txBody>
       </p:sp>
@@ -5706,17 +5655,6 @@
           <a:lstStyle/>
           <a:p>
             <a:r>
-              <a:rPr lang="en-US" sz="2400" dirty="0" err="1">
-                <a:solidFill>
-                  <a:schemeClr val="accent6">
-                    <a:lumMod val="60000"/>
-                    <a:lumOff val="40000"/>
-                  </a:schemeClr>
-                </a:solidFill>
-              </a:rPr>
-              <a:t>LlamaIndex</a:t>
-            </a:r>
-            <a:r>
               <a:rPr lang="en-US" sz="2400" dirty="0">
                 <a:solidFill>
                   <a:schemeClr val="accent6">
@@ -5725,7 +5663,7 @@
                   </a:schemeClr>
                 </a:solidFill>
               </a:rPr>
-              <a:t> bridges that gap by giving you tools to:</a:t>
+              <a:t>LlamaIndex bridges that gap by giving you tools to:</a:t>
             </a:r>
           </a:p>
           <a:p>
@@ -5931,55 +5869,6 @@
           </a:prstGeom>
         </p:spPr>
       </p:pic>
-      <p:sp>
-        <p:nvSpPr>
-          <p:cNvPr id="4" name="Oval 3">
-            <a:extLst>
-              <a:ext uri="{FF2B5EF4-FFF2-40B4-BE49-F238E27FC236}">
-                <a16:creationId xmlns:a16="http://schemas.microsoft.com/office/drawing/2014/main" id="{9EC5468A-5601-E14B-0F42-36C40F78F298}"/>
-              </a:ext>
-            </a:extLst>
-          </p:cNvPr>
-          <p:cNvSpPr/>
-          <p:nvPr/>
-        </p:nvSpPr>
-        <p:spPr>
-          <a:xfrm>
-            <a:off x="6483127" y="2309356"/>
-            <a:ext cx="1725788" cy="1119140"/>
-          </a:xfrm>
-          <a:prstGeom prst="ellipse">
-            <a:avLst/>
-          </a:prstGeom>
-        </p:spPr>
-        <p:style>
-          <a:lnRef idx="2">
-            <a:schemeClr val="accent1">
-              <a:shade val="15000"/>
-            </a:schemeClr>
-          </a:lnRef>
-          <a:fillRef idx="1">
-            <a:schemeClr val="accent1"/>
-          </a:fillRef>
-          <a:effectRef idx="0">
-            <a:schemeClr val="accent1"/>
-          </a:effectRef>
-          <a:fontRef idx="minor">
-            <a:schemeClr val="lt1"/>
-          </a:fontRef>
-        </p:style>
-        <p:txBody>
-          <a:bodyPr rtlCol="0" anchor="ctr"/>
-          <a:lstStyle/>
-          <a:p>
-            <a:pPr algn="ctr"/>
-            <a:r>
-              <a:rPr lang="en-US" dirty="0"/>
-              <a:t>Personal File</a:t>
-            </a:r>
-          </a:p>
-        </p:txBody>
-      </p:sp>
       <p:grpSp>
         <p:nvGrpSpPr>
           <p:cNvPr id="5" name="Group 4">
@@ -6000,8 +5889,8 @@
             <a:chExt cx="624240" cy="232560"/>
           </a:xfrm>
         </p:grpSpPr>
-        <mc:AlternateContent xmlns:mc="http://schemas.openxmlformats.org/markup-compatibility/2006">
-          <mc:Choice xmlns:p14="http://schemas.microsoft.com/office/powerpoint/2010/main" Requires="p14">
+        <mc:AlternateContent xmlns:mc="http://schemas.openxmlformats.org/markup-compatibility/2006" xmlns:p14="http://schemas.microsoft.com/office/powerpoint/2010/main">
+          <mc:Choice Requires="p14">
             <p:contentPart p14:bwMode="auto" r:id="rId3">
               <p14:nvContentPartPr>
                 <p14:cNvPr id="6" name="Ink 5">
@@ -6020,7 +5909,7 @@
               </p14:xfrm>
             </p:contentPart>
           </mc:Choice>
-          <mc:Fallback>
+          <mc:Fallback xmlns="">
             <p:pic>
               <p:nvPicPr>
                 <p:cNvPr id="6" name="Ink 5">
@@ -6051,8 +5940,8 @@
             </p:pic>
           </mc:Fallback>
         </mc:AlternateContent>
-        <mc:AlternateContent xmlns:mc="http://schemas.openxmlformats.org/markup-compatibility/2006">
-          <mc:Choice xmlns:p14="http://schemas.microsoft.com/office/powerpoint/2010/main" Requires="p14">
+        <mc:AlternateContent xmlns:mc="http://schemas.openxmlformats.org/markup-compatibility/2006" xmlns:p14="http://schemas.microsoft.com/office/powerpoint/2010/main">
+          <mc:Choice Requires="p14">
             <p:contentPart p14:bwMode="auto" r:id="rId5">
               <p14:nvContentPartPr>
                 <p14:cNvPr id="7" name="Ink 6">
@@ -6071,7 +5960,7 @@
               </p14:xfrm>
             </p:contentPart>
           </mc:Choice>
-          <mc:Fallback>
+          <mc:Fallback xmlns="">
             <p:pic>
               <p:nvPicPr>
                 <p:cNvPr id="7" name="Ink 6">
@@ -6132,7 +6021,7 @@
           <a:lstStyle/>
           <a:p>
             <a:r>
-              <a:rPr lang="en-US" dirty="0" err="1">
+              <a:rPr lang="en-US" dirty="0">
                 <a:solidFill>
                   <a:schemeClr val="accent6">
                     <a:lumMod val="60000"/>
@@ -6142,14 +6031,6 @@
               </a:rPr>
               <a:t>llamaindex</a:t>
             </a:r>
-            <a:endParaRPr lang="en-US" dirty="0">
-              <a:solidFill>
-                <a:schemeClr val="accent6">
-                  <a:lumMod val="60000"/>
-                  <a:lumOff val="40000"/>
-                </a:schemeClr>
-              </a:solidFill>
-            </a:endParaRPr>
           </a:p>
         </p:txBody>
       </p:sp>
@@ -6173,8 +6054,8 @@
             <a:chExt cx="624240" cy="232560"/>
           </a:xfrm>
         </p:grpSpPr>
-        <mc:AlternateContent xmlns:mc="http://schemas.openxmlformats.org/markup-compatibility/2006">
-          <mc:Choice xmlns:p14="http://schemas.microsoft.com/office/powerpoint/2010/main" Requires="p14">
+        <mc:AlternateContent xmlns:mc="http://schemas.openxmlformats.org/markup-compatibility/2006" xmlns:p14="http://schemas.microsoft.com/office/powerpoint/2010/main">
+          <mc:Choice Requires="p14">
             <p:contentPart p14:bwMode="auto" r:id="rId7">
               <p14:nvContentPartPr>
                 <p14:cNvPr id="10" name="Ink 9">
@@ -6193,7 +6074,7 @@
               </p14:xfrm>
             </p:contentPart>
           </mc:Choice>
-          <mc:Fallback>
+          <mc:Fallback xmlns="">
             <p:pic>
               <p:nvPicPr>
                 <p:cNvPr id="10" name="Ink 9">
@@ -6224,8 +6105,8 @@
             </p:pic>
           </mc:Fallback>
         </mc:AlternateContent>
-        <mc:AlternateContent xmlns:mc="http://schemas.openxmlformats.org/markup-compatibility/2006">
-          <mc:Choice xmlns:p14="http://schemas.microsoft.com/office/powerpoint/2010/main" Requires="p14">
+        <mc:AlternateContent xmlns:mc="http://schemas.openxmlformats.org/markup-compatibility/2006" xmlns:p14="http://schemas.microsoft.com/office/powerpoint/2010/main">
+          <mc:Choice Requires="p14">
             <p:contentPart p14:bwMode="auto" r:id="rId8">
               <p14:nvContentPartPr>
                 <p14:cNvPr id="11" name="Ink 10">
@@ -6244,7 +6125,7 @@
               </p14:xfrm>
             </p:contentPart>
           </mc:Choice>
-          <mc:Fallback>
+          <mc:Fallback xmlns="">
             <p:pic>
               <p:nvPicPr>
                 <p:cNvPr id="11" name="Ink 10">
@@ -6276,6 +6157,67 @@
           </mc:Fallback>
         </mc:AlternateContent>
       </p:grpSp>
+      <p:sp>
+        <p:nvSpPr>
+          <p:cNvPr id="12" name="Oval 11">
+            <a:extLst>
+              <a:ext uri="{FF2B5EF4-FFF2-40B4-BE49-F238E27FC236}">
+                <a16:creationId xmlns:a16="http://schemas.microsoft.com/office/drawing/2014/main" id="{CC2594F8-539B-9ED1-1042-835423C4B483}"/>
+              </a:ext>
+            </a:extLst>
+          </p:cNvPr>
+          <p:cNvSpPr/>
+          <p:nvPr/>
+        </p:nvSpPr>
+        <p:spPr>
+          <a:xfrm>
+            <a:off x="6382543" y="2300212"/>
+            <a:ext cx="2030554" cy="1119140"/>
+          </a:xfrm>
+          <a:prstGeom prst="ellipse">
+            <a:avLst/>
+          </a:prstGeom>
+        </p:spPr>
+        <p:style>
+          <a:lnRef idx="2">
+            <a:schemeClr val="accent1">
+              <a:shade val="15000"/>
+            </a:schemeClr>
+          </a:lnRef>
+          <a:fillRef idx="1">
+            <a:schemeClr val="accent1"/>
+          </a:fillRef>
+          <a:effectRef idx="0">
+            <a:schemeClr val="accent1"/>
+          </a:effectRef>
+          <a:fontRef idx="minor">
+            <a:schemeClr val="lt1"/>
+          </a:fontRef>
+        </p:style>
+        <p:txBody>
+          <a:bodyPr rtlCol="0" anchor="ctr"/>
+          <a:lstStyle/>
+          <a:p>
+            <a:pPr algn="ctr"/>
+            <a:r>
+              <a:rPr lang="en-US" dirty="0"/>
+              <a:t>Personal File:</a:t>
+            </a:r>
+          </a:p>
+          <a:p>
+            <a:pPr algn="ctr"/>
+            <a:r>
+              <a:rPr lang="en-US" dirty="0"/>
+              <a:t>PDF, DB, Excel, </a:t>
+            </a:r>
+            <a:r>
+              <a:rPr lang="en-US" dirty="0" err="1"/>
+              <a:t>etc</a:t>
+            </a:r>
+            <a:endParaRPr lang="en-US" dirty="0"/>
+          </a:p>
+        </p:txBody>
+      </p:sp>
     </p:spTree>
     <p:extLst>
       <p:ext uri="{BB962C8B-B14F-4D97-AF65-F5344CB8AC3E}">
@@ -6372,29 +6314,7 @@
                   </a:schemeClr>
                 </a:solidFill>
               </a:rPr>
-              <a:t>Without </a:t>
-            </a:r>
-            <a:r>
-              <a:rPr lang="en-US" sz="2400" dirty="0" err="1">
-                <a:solidFill>
-                  <a:schemeClr val="accent6">
-                    <a:lumMod val="60000"/>
-                    <a:lumOff val="40000"/>
-                  </a:schemeClr>
-                </a:solidFill>
-              </a:rPr>
-              <a:t>LlamaIndex</a:t>
-            </a:r>
-            <a:r>
-              <a:rPr lang="en-US" sz="2400" dirty="0">
-                <a:solidFill>
-                  <a:schemeClr val="accent6">
-                    <a:lumMod val="60000"/>
-                    <a:lumOff val="40000"/>
-                  </a:schemeClr>
-                </a:solidFill>
-              </a:rPr>
-              <a:t>, you'd have to manually paste document text into a prompt — but LLMs have context limits (</a:t>
+              <a:t>Without LlamaIndex, you'd have to manually paste document text into a prompt — but LLMs have context limits (</a:t>
             </a:r>
             <a:r>
               <a:rPr lang="en-US" sz="2400" b="1" dirty="0">
@@ -6431,17 +6351,6 @@
           </a:p>
           <a:p>
             <a:r>
-              <a:rPr lang="en-US" sz="2400" dirty="0" err="1">
-                <a:solidFill>
-                  <a:schemeClr val="accent6">
-                    <a:lumMod val="60000"/>
-                    <a:lumOff val="40000"/>
-                  </a:schemeClr>
-                </a:solidFill>
-              </a:rPr>
-              <a:t>LlamaIndex</a:t>
-            </a:r>
-            <a:r>
               <a:rPr lang="en-US" sz="2400" dirty="0">
                 <a:solidFill>
                   <a:schemeClr val="accent6">
@@ -6450,7 +6359,7 @@
                   </a:schemeClr>
                 </a:solidFill>
               </a:rPr>
-              <a:t> handles </a:t>
+              <a:t>LlamaIndex handles </a:t>
             </a:r>
           </a:p>
           <a:p>
@@ -6580,55 +6489,6 @@
           </a:prstGeom>
         </p:spPr>
       </p:pic>
-      <p:sp>
-        <p:nvSpPr>
-          <p:cNvPr id="4" name="Oval 3">
-            <a:extLst>
-              <a:ext uri="{FF2B5EF4-FFF2-40B4-BE49-F238E27FC236}">
-                <a16:creationId xmlns:a16="http://schemas.microsoft.com/office/drawing/2014/main" id="{929AA63D-DCC1-B310-3FF1-4CBE387350C9}"/>
-              </a:ext>
-            </a:extLst>
-          </p:cNvPr>
-          <p:cNvSpPr/>
-          <p:nvPr/>
-        </p:nvSpPr>
-        <p:spPr>
-          <a:xfrm>
-            <a:off x="6483127" y="2309356"/>
-            <a:ext cx="1725788" cy="1119140"/>
-          </a:xfrm>
-          <a:prstGeom prst="ellipse">
-            <a:avLst/>
-          </a:prstGeom>
-        </p:spPr>
-        <p:style>
-          <a:lnRef idx="2">
-            <a:schemeClr val="accent1">
-              <a:shade val="15000"/>
-            </a:schemeClr>
-          </a:lnRef>
-          <a:fillRef idx="1">
-            <a:schemeClr val="accent1"/>
-          </a:fillRef>
-          <a:effectRef idx="0">
-            <a:schemeClr val="accent1"/>
-          </a:effectRef>
-          <a:fontRef idx="minor">
-            <a:schemeClr val="lt1"/>
-          </a:fontRef>
-        </p:style>
-        <p:txBody>
-          <a:bodyPr rtlCol="0" anchor="ctr"/>
-          <a:lstStyle/>
-          <a:p>
-            <a:pPr algn="ctr"/>
-            <a:r>
-              <a:rPr lang="en-US" dirty="0"/>
-              <a:t>Personal File</a:t>
-            </a:r>
-          </a:p>
-        </p:txBody>
-      </p:sp>
       <p:grpSp>
         <p:nvGrpSpPr>
           <p:cNvPr id="5" name="Group 4">
@@ -6649,8 +6509,8 @@
             <a:chExt cx="624240" cy="232560"/>
           </a:xfrm>
         </p:grpSpPr>
-        <mc:AlternateContent xmlns:mc="http://schemas.openxmlformats.org/markup-compatibility/2006">
-          <mc:Choice xmlns:p14="http://schemas.microsoft.com/office/powerpoint/2010/main" Requires="p14">
+        <mc:AlternateContent xmlns:mc="http://schemas.openxmlformats.org/markup-compatibility/2006" xmlns:p14="http://schemas.microsoft.com/office/powerpoint/2010/main">
+          <mc:Choice Requires="p14">
             <p:contentPart p14:bwMode="auto" r:id="rId3">
               <p14:nvContentPartPr>
                 <p14:cNvPr id="6" name="Ink 5">
@@ -6669,7 +6529,7 @@
               </p14:xfrm>
             </p:contentPart>
           </mc:Choice>
-          <mc:Fallback>
+          <mc:Fallback xmlns="">
             <p:pic>
               <p:nvPicPr>
                 <p:cNvPr id="6" name="Ink 5">
@@ -6700,8 +6560,8 @@
             </p:pic>
           </mc:Fallback>
         </mc:AlternateContent>
-        <mc:AlternateContent xmlns:mc="http://schemas.openxmlformats.org/markup-compatibility/2006">
-          <mc:Choice xmlns:p14="http://schemas.microsoft.com/office/powerpoint/2010/main" Requires="p14">
+        <mc:AlternateContent xmlns:mc="http://schemas.openxmlformats.org/markup-compatibility/2006" xmlns:p14="http://schemas.microsoft.com/office/powerpoint/2010/main">
+          <mc:Choice Requires="p14">
             <p:contentPart p14:bwMode="auto" r:id="rId5">
               <p14:nvContentPartPr>
                 <p14:cNvPr id="7" name="Ink 6">
@@ -6720,7 +6580,7 @@
               </p14:xfrm>
             </p:contentPart>
           </mc:Choice>
-          <mc:Fallback>
+          <mc:Fallback xmlns="">
             <p:pic>
               <p:nvPicPr>
                 <p:cNvPr id="7" name="Ink 6">
@@ -6781,7 +6641,7 @@
           <a:lstStyle/>
           <a:p>
             <a:r>
-              <a:rPr lang="en-US" dirty="0" err="1">
+              <a:rPr lang="en-US" dirty="0">
                 <a:solidFill>
                   <a:schemeClr val="accent6">
                     <a:lumMod val="60000"/>
@@ -6791,14 +6651,6 @@
               </a:rPr>
               <a:t>llamaindex</a:t>
             </a:r>
-            <a:endParaRPr lang="en-US" dirty="0">
-              <a:solidFill>
-                <a:schemeClr val="accent6">
-                  <a:lumMod val="60000"/>
-                  <a:lumOff val="40000"/>
-                </a:schemeClr>
-              </a:solidFill>
-            </a:endParaRPr>
           </a:p>
         </p:txBody>
       </p:sp>
@@ -6822,8 +6674,8 @@
             <a:chExt cx="624240" cy="232560"/>
           </a:xfrm>
         </p:grpSpPr>
-        <mc:AlternateContent xmlns:mc="http://schemas.openxmlformats.org/markup-compatibility/2006">
-          <mc:Choice xmlns:p14="http://schemas.microsoft.com/office/powerpoint/2010/main" Requires="p14">
+        <mc:AlternateContent xmlns:mc="http://schemas.openxmlformats.org/markup-compatibility/2006" xmlns:p14="http://schemas.microsoft.com/office/powerpoint/2010/main">
+          <mc:Choice Requires="p14">
             <p:contentPart p14:bwMode="auto" r:id="rId7">
               <p14:nvContentPartPr>
                 <p14:cNvPr id="10" name="Ink 9">
@@ -6842,7 +6694,7 @@
               </p14:xfrm>
             </p:contentPart>
           </mc:Choice>
-          <mc:Fallback>
+          <mc:Fallback xmlns="">
             <p:pic>
               <p:nvPicPr>
                 <p:cNvPr id="10" name="Ink 9">
@@ -6873,8 +6725,8 @@
             </p:pic>
           </mc:Fallback>
         </mc:AlternateContent>
-        <mc:AlternateContent xmlns:mc="http://schemas.openxmlformats.org/markup-compatibility/2006">
-          <mc:Choice xmlns:p14="http://schemas.microsoft.com/office/powerpoint/2010/main" Requires="p14">
+        <mc:AlternateContent xmlns:mc="http://schemas.openxmlformats.org/markup-compatibility/2006" xmlns:p14="http://schemas.microsoft.com/office/powerpoint/2010/main">
+          <mc:Choice Requires="p14">
             <p:contentPart p14:bwMode="auto" r:id="rId8">
               <p14:nvContentPartPr>
                 <p14:cNvPr id="11" name="Ink 10">
@@ -6893,7 +6745,7 @@
               </p14:xfrm>
             </p:contentPart>
           </mc:Choice>
-          <mc:Fallback>
+          <mc:Fallback xmlns="">
             <p:pic>
               <p:nvPicPr>
                 <p:cNvPr id="11" name="Ink 10">
@@ -6925,6 +6777,62 @@
           </mc:Fallback>
         </mc:AlternateContent>
       </p:grpSp>
+      <p:sp>
+        <p:nvSpPr>
+          <p:cNvPr id="12" name="Oval 11">
+            <a:extLst>
+              <a:ext uri="{FF2B5EF4-FFF2-40B4-BE49-F238E27FC236}">
+                <a16:creationId xmlns:a16="http://schemas.microsoft.com/office/drawing/2014/main" id="{7471B152-27AF-C37A-F2AF-D8AB1E8CDD92}"/>
+              </a:ext>
+            </a:extLst>
+          </p:cNvPr>
+          <p:cNvSpPr/>
+          <p:nvPr/>
+        </p:nvSpPr>
+        <p:spPr>
+          <a:xfrm>
+            <a:off x="6199663" y="2309356"/>
+            <a:ext cx="2030554" cy="1119140"/>
+          </a:xfrm>
+          <a:prstGeom prst="ellipse">
+            <a:avLst/>
+          </a:prstGeom>
+        </p:spPr>
+        <p:style>
+          <a:lnRef idx="2">
+            <a:schemeClr val="accent1">
+              <a:shade val="15000"/>
+            </a:schemeClr>
+          </a:lnRef>
+          <a:fillRef idx="1">
+            <a:schemeClr val="accent1"/>
+          </a:fillRef>
+          <a:effectRef idx="0">
+            <a:schemeClr val="accent1"/>
+          </a:effectRef>
+          <a:fontRef idx="minor">
+            <a:schemeClr val="lt1"/>
+          </a:fontRef>
+        </p:style>
+        <p:txBody>
+          <a:bodyPr rtlCol="0" anchor="ctr"/>
+          <a:lstStyle/>
+          <a:p>
+            <a:pPr algn="ctr"/>
+            <a:r>
+              <a:rPr lang="en-US" dirty="0"/>
+              <a:t>Personal File:</a:t>
+            </a:r>
+          </a:p>
+          <a:p>
+            <a:pPr algn="ctr"/>
+            <a:r>
+              <a:rPr lang="en-US" dirty="0"/>
+              <a:t>PDF, DB, Excel, etc.</a:t>
+            </a:r>
+          </a:p>
+        </p:txBody>
+      </p:sp>
     </p:spTree>
     <p:extLst>
       <p:ext uri="{BB962C8B-B14F-4D97-AF65-F5344CB8AC3E}">
@@ -7414,7 +7322,7 @@
           <a:lstStyle/>
           <a:p>
             <a:r>
-              <a:rPr lang="en-US" dirty="0" err="1">
+              <a:rPr lang="en-US" dirty="0">
                 <a:solidFill>
                   <a:schemeClr val="accent6">
                     <a:lumMod val="60000"/>
@@ -7424,14 +7332,6 @@
               </a:rPr>
               <a:t>llamaindex</a:t>
             </a:r>
-            <a:endParaRPr lang="en-US" dirty="0">
-              <a:solidFill>
-                <a:schemeClr val="accent6">
-                  <a:lumMod val="60000"/>
-                  <a:lumOff val="40000"/>
-                </a:schemeClr>
-              </a:solidFill>
-            </a:endParaRPr>
           </a:p>
         </p:txBody>
       </p:sp>
@@ -7882,8 +7782,8 @@
             <a:chExt cx="624240" cy="232560"/>
           </a:xfrm>
         </p:grpSpPr>
-        <mc:AlternateContent xmlns:mc="http://schemas.openxmlformats.org/markup-compatibility/2006">
-          <mc:Choice xmlns:p14="http://schemas.microsoft.com/office/powerpoint/2010/main" Requires="p14">
+        <mc:AlternateContent xmlns:mc="http://schemas.openxmlformats.org/markup-compatibility/2006" xmlns:p14="http://schemas.microsoft.com/office/powerpoint/2010/main">
+          <mc:Choice Requires="p14">
             <p:contentPart p14:bwMode="auto" r:id="rId3">
               <p14:nvContentPartPr>
                 <p14:cNvPr id="6" name="Ink 5">
@@ -7902,7 +7802,7 @@
               </p14:xfrm>
             </p:contentPart>
           </mc:Choice>
-          <mc:Fallback>
+          <mc:Fallback xmlns="">
             <p:pic>
               <p:nvPicPr>
                 <p:cNvPr id="6" name="Ink 5">
@@ -7933,8 +7833,8 @@
             </p:pic>
           </mc:Fallback>
         </mc:AlternateContent>
-        <mc:AlternateContent xmlns:mc="http://schemas.openxmlformats.org/markup-compatibility/2006">
-          <mc:Choice xmlns:p14="http://schemas.microsoft.com/office/powerpoint/2010/main" Requires="p14">
+        <mc:AlternateContent xmlns:mc="http://schemas.openxmlformats.org/markup-compatibility/2006" xmlns:p14="http://schemas.microsoft.com/office/powerpoint/2010/main">
+          <mc:Choice Requires="p14">
             <p:contentPart p14:bwMode="auto" r:id="rId5">
               <p14:nvContentPartPr>
                 <p14:cNvPr id="7" name="Ink 6">
@@ -7953,7 +7853,7 @@
               </p14:xfrm>
             </p:contentPart>
           </mc:Choice>
-          <mc:Fallback>
+          <mc:Fallback xmlns="">
             <p:pic>
               <p:nvPicPr>
                 <p:cNvPr id="7" name="Ink 6">
@@ -8014,7 +7914,7 @@
           <a:lstStyle/>
           <a:p>
             <a:r>
-              <a:rPr lang="en-US" dirty="0" err="1">
+              <a:rPr lang="en-US" dirty="0">
                 <a:solidFill>
                   <a:schemeClr val="accent6">
                     <a:lumMod val="60000"/>
@@ -8024,14 +7924,6 @@
               </a:rPr>
               <a:t>llamaindex</a:t>
             </a:r>
-            <a:endParaRPr lang="en-US" dirty="0">
-              <a:solidFill>
-                <a:schemeClr val="accent6">
-                  <a:lumMod val="60000"/>
-                  <a:lumOff val="40000"/>
-                </a:schemeClr>
-              </a:solidFill>
-            </a:endParaRPr>
           </a:p>
         </p:txBody>
       </p:sp>
@@ -8055,8 +7947,8 @@
             <a:chExt cx="624240" cy="232560"/>
           </a:xfrm>
         </p:grpSpPr>
-        <mc:AlternateContent xmlns:mc="http://schemas.openxmlformats.org/markup-compatibility/2006">
-          <mc:Choice xmlns:p14="http://schemas.microsoft.com/office/powerpoint/2010/main" Requires="p14">
+        <mc:AlternateContent xmlns:mc="http://schemas.openxmlformats.org/markup-compatibility/2006" xmlns:p14="http://schemas.microsoft.com/office/powerpoint/2010/main">
+          <mc:Choice Requires="p14">
             <p:contentPart p14:bwMode="auto" r:id="rId7">
               <p14:nvContentPartPr>
                 <p14:cNvPr id="10" name="Ink 9">
@@ -8075,7 +7967,7 @@
               </p14:xfrm>
             </p:contentPart>
           </mc:Choice>
-          <mc:Fallback>
+          <mc:Fallback xmlns="">
             <p:pic>
               <p:nvPicPr>
                 <p:cNvPr id="10" name="Ink 9">
@@ -8106,8 +7998,8 @@
             </p:pic>
           </mc:Fallback>
         </mc:AlternateContent>
-        <mc:AlternateContent xmlns:mc="http://schemas.openxmlformats.org/markup-compatibility/2006">
-          <mc:Choice xmlns:p14="http://schemas.microsoft.com/office/powerpoint/2010/main" Requires="p14">
+        <mc:AlternateContent xmlns:mc="http://schemas.openxmlformats.org/markup-compatibility/2006" xmlns:p14="http://schemas.microsoft.com/office/powerpoint/2010/main">
+          <mc:Choice Requires="p14">
             <p:contentPart p14:bwMode="auto" r:id="rId8">
               <p14:nvContentPartPr>
                 <p14:cNvPr id="11" name="Ink 10">
@@ -8126,7 +8018,7 @@
               </p14:xfrm>
             </p:contentPart>
           </mc:Choice>
-          <mc:Fallback>
+          <mc:Fallback xmlns="">
             <p:pic>
               <p:nvPicPr>
                 <p:cNvPr id="11" name="Ink 10">
@@ -8492,8 +8384,8 @@
             <a:chExt cx="624240" cy="232560"/>
           </a:xfrm>
         </p:grpSpPr>
-        <mc:AlternateContent xmlns:mc="http://schemas.openxmlformats.org/markup-compatibility/2006">
-          <mc:Choice xmlns:p14="http://schemas.microsoft.com/office/powerpoint/2010/main" Requires="p14">
+        <mc:AlternateContent xmlns:mc="http://schemas.openxmlformats.org/markup-compatibility/2006" xmlns:p14="http://schemas.microsoft.com/office/powerpoint/2010/main">
+          <mc:Choice Requires="p14">
             <p:contentPart p14:bwMode="auto" r:id="rId3">
               <p14:nvContentPartPr>
                 <p14:cNvPr id="6" name="Ink 5">
@@ -8512,7 +8404,7 @@
               </p14:xfrm>
             </p:contentPart>
           </mc:Choice>
-          <mc:Fallback>
+          <mc:Fallback xmlns="">
             <p:pic>
               <p:nvPicPr>
                 <p:cNvPr id="6" name="Ink 5">
@@ -8543,8 +8435,8 @@
             </p:pic>
           </mc:Fallback>
         </mc:AlternateContent>
-        <mc:AlternateContent xmlns:mc="http://schemas.openxmlformats.org/markup-compatibility/2006">
-          <mc:Choice xmlns:p14="http://schemas.microsoft.com/office/powerpoint/2010/main" Requires="p14">
+        <mc:AlternateContent xmlns:mc="http://schemas.openxmlformats.org/markup-compatibility/2006" xmlns:p14="http://schemas.microsoft.com/office/powerpoint/2010/main">
+          <mc:Choice Requires="p14">
             <p:contentPart p14:bwMode="auto" r:id="rId5">
               <p14:nvContentPartPr>
                 <p14:cNvPr id="7" name="Ink 6">
@@ -8563,7 +8455,7 @@
               </p14:xfrm>
             </p:contentPart>
           </mc:Choice>
-          <mc:Fallback>
+          <mc:Fallback xmlns="">
             <p:pic>
               <p:nvPicPr>
                 <p:cNvPr id="7" name="Ink 6">
@@ -8624,7 +8516,7 @@
           <a:lstStyle/>
           <a:p>
             <a:r>
-              <a:rPr lang="en-US" dirty="0" err="1">
+              <a:rPr lang="en-US" dirty="0">
                 <a:solidFill>
                   <a:schemeClr val="accent6">
                     <a:lumMod val="60000"/>
@@ -8634,14 +8526,6 @@
               </a:rPr>
               <a:t>llamaindex</a:t>
             </a:r>
-            <a:endParaRPr lang="en-US" dirty="0">
-              <a:solidFill>
-                <a:schemeClr val="accent6">
-                  <a:lumMod val="60000"/>
-                  <a:lumOff val="40000"/>
-                </a:schemeClr>
-              </a:solidFill>
-            </a:endParaRPr>
           </a:p>
         </p:txBody>
       </p:sp>
@@ -8665,8 +8549,8 @@
             <a:chExt cx="624240" cy="232560"/>
           </a:xfrm>
         </p:grpSpPr>
-        <mc:AlternateContent xmlns:mc="http://schemas.openxmlformats.org/markup-compatibility/2006">
-          <mc:Choice xmlns:p14="http://schemas.microsoft.com/office/powerpoint/2010/main" Requires="p14">
+        <mc:AlternateContent xmlns:mc="http://schemas.openxmlformats.org/markup-compatibility/2006" xmlns:p14="http://schemas.microsoft.com/office/powerpoint/2010/main">
+          <mc:Choice Requires="p14">
             <p:contentPart p14:bwMode="auto" r:id="rId7">
               <p14:nvContentPartPr>
                 <p14:cNvPr id="10" name="Ink 9">
@@ -8685,7 +8569,7 @@
               </p14:xfrm>
             </p:contentPart>
           </mc:Choice>
-          <mc:Fallback>
+          <mc:Fallback xmlns="">
             <p:pic>
               <p:nvPicPr>
                 <p:cNvPr id="10" name="Ink 9">
@@ -8716,8 +8600,8 @@
             </p:pic>
           </mc:Fallback>
         </mc:AlternateContent>
-        <mc:AlternateContent xmlns:mc="http://schemas.openxmlformats.org/markup-compatibility/2006">
-          <mc:Choice xmlns:p14="http://schemas.microsoft.com/office/powerpoint/2010/main" Requires="p14">
+        <mc:AlternateContent xmlns:mc="http://schemas.openxmlformats.org/markup-compatibility/2006" xmlns:p14="http://schemas.microsoft.com/office/powerpoint/2010/main">
+          <mc:Choice Requires="p14">
             <p:contentPart p14:bwMode="auto" r:id="rId8">
               <p14:nvContentPartPr>
                 <p14:cNvPr id="11" name="Ink 10">
@@ -8736,7 +8620,7 @@
               </p14:xfrm>
             </p:contentPart>
           </mc:Choice>
-          <mc:Fallback>
+          <mc:Fallback xmlns="">
             <p:pic>
               <p:nvPicPr>
                 <p:cNvPr id="11" name="Ink 10">
@@ -8989,8 +8873,8 @@
             <a:chExt cx="624240" cy="232560"/>
           </a:xfrm>
         </p:grpSpPr>
-        <mc:AlternateContent xmlns:mc="http://schemas.openxmlformats.org/markup-compatibility/2006">
-          <mc:Choice xmlns:p14="http://schemas.microsoft.com/office/powerpoint/2010/main" Requires="p14">
+        <mc:AlternateContent xmlns:mc="http://schemas.openxmlformats.org/markup-compatibility/2006" xmlns:p14="http://schemas.microsoft.com/office/powerpoint/2010/main">
+          <mc:Choice Requires="p14">
             <p:contentPart p14:bwMode="auto" r:id="rId3">
               <p14:nvContentPartPr>
                 <p14:cNvPr id="6" name="Ink 5">
@@ -9009,7 +8893,7 @@
               </p14:xfrm>
             </p:contentPart>
           </mc:Choice>
-          <mc:Fallback>
+          <mc:Fallback xmlns="">
             <p:pic>
               <p:nvPicPr>
                 <p:cNvPr id="6" name="Ink 5">
@@ -9040,8 +8924,8 @@
             </p:pic>
           </mc:Fallback>
         </mc:AlternateContent>
-        <mc:AlternateContent xmlns:mc="http://schemas.openxmlformats.org/markup-compatibility/2006">
-          <mc:Choice xmlns:p14="http://schemas.microsoft.com/office/powerpoint/2010/main" Requires="p14">
+        <mc:AlternateContent xmlns:mc="http://schemas.openxmlformats.org/markup-compatibility/2006" xmlns:p14="http://schemas.microsoft.com/office/powerpoint/2010/main">
+          <mc:Choice Requires="p14">
             <p:contentPart p14:bwMode="auto" r:id="rId5">
               <p14:nvContentPartPr>
                 <p14:cNvPr id="7" name="Ink 6">
@@ -9060,7 +8944,7 @@
               </p14:xfrm>
             </p:contentPart>
           </mc:Choice>
-          <mc:Fallback>
+          <mc:Fallback xmlns="">
             <p:pic>
               <p:nvPicPr>
                 <p:cNvPr id="7" name="Ink 6">
@@ -9121,7 +9005,7 @@
           <a:lstStyle/>
           <a:p>
             <a:r>
-              <a:rPr lang="en-US" dirty="0" err="1">
+              <a:rPr lang="en-US" dirty="0">
                 <a:solidFill>
                   <a:schemeClr val="accent6">
                     <a:lumMod val="60000"/>
@@ -9131,14 +9015,6 @@
               </a:rPr>
               <a:t>llamaindex</a:t>
             </a:r>
-            <a:endParaRPr lang="en-US" dirty="0">
-              <a:solidFill>
-                <a:schemeClr val="accent6">
-                  <a:lumMod val="60000"/>
-                  <a:lumOff val="40000"/>
-                </a:schemeClr>
-              </a:solidFill>
-            </a:endParaRPr>
           </a:p>
         </p:txBody>
       </p:sp>
@@ -9162,8 +9038,8 @@
             <a:chExt cx="624240" cy="232560"/>
           </a:xfrm>
         </p:grpSpPr>
-        <mc:AlternateContent xmlns:mc="http://schemas.openxmlformats.org/markup-compatibility/2006">
-          <mc:Choice xmlns:p14="http://schemas.microsoft.com/office/powerpoint/2010/main" Requires="p14">
+        <mc:AlternateContent xmlns:mc="http://schemas.openxmlformats.org/markup-compatibility/2006" xmlns:p14="http://schemas.microsoft.com/office/powerpoint/2010/main">
+          <mc:Choice Requires="p14">
             <p:contentPart p14:bwMode="auto" r:id="rId7">
               <p14:nvContentPartPr>
                 <p14:cNvPr id="10" name="Ink 9">
@@ -9182,7 +9058,7 @@
               </p14:xfrm>
             </p:contentPart>
           </mc:Choice>
-          <mc:Fallback>
+          <mc:Fallback xmlns="">
             <p:pic>
               <p:nvPicPr>
                 <p:cNvPr id="10" name="Ink 9">
@@ -9213,8 +9089,8 @@
             </p:pic>
           </mc:Fallback>
         </mc:AlternateContent>
-        <mc:AlternateContent xmlns:mc="http://schemas.openxmlformats.org/markup-compatibility/2006">
-          <mc:Choice xmlns:p14="http://schemas.microsoft.com/office/powerpoint/2010/main" Requires="p14">
+        <mc:AlternateContent xmlns:mc="http://schemas.openxmlformats.org/markup-compatibility/2006" xmlns:p14="http://schemas.microsoft.com/office/powerpoint/2010/main">
+          <mc:Choice Requires="p14">
             <p:contentPart p14:bwMode="auto" r:id="rId8">
               <p14:nvContentPartPr>
                 <p14:cNvPr id="11" name="Ink 10">
@@ -9233,7 +9109,7 @@
               </p14:xfrm>
             </p:contentPart>
           </mc:Choice>
-          <mc:Fallback>
+          <mc:Fallback xmlns="">
             <p:pic>
               <p:nvPicPr>
                 <p:cNvPr id="11" name="Ink 10">
@@ -9400,8 +9276,8 @@
             <a:chExt cx="624240" cy="232560"/>
           </a:xfrm>
         </p:grpSpPr>
-        <mc:AlternateContent xmlns:mc="http://schemas.openxmlformats.org/markup-compatibility/2006">
-          <mc:Choice xmlns:p14="http://schemas.microsoft.com/office/powerpoint/2010/main" Requires="p14">
+        <mc:AlternateContent xmlns:mc="http://schemas.openxmlformats.org/markup-compatibility/2006" xmlns:p14="http://schemas.microsoft.com/office/powerpoint/2010/main">
+          <mc:Choice Requires="p14">
             <p:contentPart p14:bwMode="auto" r:id="rId3">
               <p14:nvContentPartPr>
                 <p14:cNvPr id="6" name="Ink 5">
@@ -9420,7 +9296,7 @@
               </p14:xfrm>
             </p:contentPart>
           </mc:Choice>
-          <mc:Fallback>
+          <mc:Fallback xmlns="">
             <p:pic>
               <p:nvPicPr>
                 <p:cNvPr id="6" name="Ink 5">
@@ -9451,8 +9327,8 @@
             </p:pic>
           </mc:Fallback>
         </mc:AlternateContent>
-        <mc:AlternateContent xmlns:mc="http://schemas.openxmlformats.org/markup-compatibility/2006">
-          <mc:Choice xmlns:p14="http://schemas.microsoft.com/office/powerpoint/2010/main" Requires="p14">
+        <mc:AlternateContent xmlns:mc="http://schemas.openxmlformats.org/markup-compatibility/2006" xmlns:p14="http://schemas.microsoft.com/office/powerpoint/2010/main">
+          <mc:Choice Requires="p14">
             <p:contentPart p14:bwMode="auto" r:id="rId5">
               <p14:nvContentPartPr>
                 <p14:cNvPr id="7" name="Ink 6">
@@ -9471,7 +9347,7 @@
               </p14:xfrm>
             </p:contentPart>
           </mc:Choice>
-          <mc:Fallback>
+          <mc:Fallback xmlns="">
             <p:pic>
               <p:nvPicPr>
                 <p:cNvPr id="7" name="Ink 6">
@@ -9532,7 +9408,7 @@
           <a:lstStyle/>
           <a:p>
             <a:r>
-              <a:rPr lang="en-US" dirty="0" err="1">
+              <a:rPr lang="en-US" dirty="0">
                 <a:solidFill>
                   <a:schemeClr val="accent6">
                     <a:lumMod val="60000"/>
@@ -9542,14 +9418,6 @@
               </a:rPr>
               <a:t>llamaindex</a:t>
             </a:r>
-            <a:endParaRPr lang="en-US" dirty="0">
-              <a:solidFill>
-                <a:schemeClr val="accent6">
-                  <a:lumMod val="60000"/>
-                  <a:lumOff val="40000"/>
-                </a:schemeClr>
-              </a:solidFill>
-            </a:endParaRPr>
           </a:p>
         </p:txBody>
       </p:sp>
@@ -9573,8 +9441,8 @@
             <a:chExt cx="624240" cy="232560"/>
           </a:xfrm>
         </p:grpSpPr>
-        <mc:AlternateContent xmlns:mc="http://schemas.openxmlformats.org/markup-compatibility/2006">
-          <mc:Choice xmlns:p14="http://schemas.microsoft.com/office/powerpoint/2010/main" Requires="p14">
+        <mc:AlternateContent xmlns:mc="http://schemas.openxmlformats.org/markup-compatibility/2006" xmlns:p14="http://schemas.microsoft.com/office/powerpoint/2010/main">
+          <mc:Choice Requires="p14">
             <p:contentPart p14:bwMode="auto" r:id="rId7">
               <p14:nvContentPartPr>
                 <p14:cNvPr id="10" name="Ink 9">
@@ -9593,7 +9461,7 @@
               </p14:xfrm>
             </p:contentPart>
           </mc:Choice>
-          <mc:Fallback>
+          <mc:Fallback xmlns="">
             <p:pic>
               <p:nvPicPr>
                 <p:cNvPr id="10" name="Ink 9">
@@ -9624,8 +9492,8 @@
             </p:pic>
           </mc:Fallback>
         </mc:AlternateContent>
-        <mc:AlternateContent xmlns:mc="http://schemas.openxmlformats.org/markup-compatibility/2006">
-          <mc:Choice xmlns:p14="http://schemas.microsoft.com/office/powerpoint/2010/main" Requires="p14">
+        <mc:AlternateContent xmlns:mc="http://schemas.openxmlformats.org/markup-compatibility/2006" xmlns:p14="http://schemas.microsoft.com/office/powerpoint/2010/main">
+          <mc:Choice Requires="p14">
             <p:contentPart p14:bwMode="auto" r:id="rId8">
               <p14:nvContentPartPr>
                 <p14:cNvPr id="11" name="Ink 10">
@@ -9644,7 +9512,7 @@
               </p14:xfrm>
             </p:contentPart>
           </mc:Choice>
-          <mc:Fallback>
+          <mc:Fallback xmlns="">
             <p:pic>
               <p:nvPicPr>
                 <p:cNvPr id="11" name="Ink 10">
@@ -9827,17 +9695,6 @@
               <a:buChar char="•"/>
             </a:pPr>
             <a:r>
-              <a:rPr lang="en-US" sz="2400" dirty="0" err="1">
-                <a:solidFill>
-                  <a:schemeClr val="accent6">
-                    <a:lumMod val="60000"/>
-                    <a:lumOff val="40000"/>
-                  </a:schemeClr>
-                </a:solidFill>
-              </a:rPr>
-              <a:t>LlamaIndex</a:t>
-            </a:r>
-            <a:r>
               <a:rPr lang="en-US" sz="2400" dirty="0">
                 <a:solidFill>
                   <a:schemeClr val="accent6">
@@ -9846,7 +9703,7 @@
                   </a:schemeClr>
                 </a:solidFill>
               </a:rPr>
-              <a:t> is more focused and opinionated specifically around </a:t>
+              <a:t>LlamaIndex is more focused and opinionated specifically around </a:t>
             </a:r>
             <a:r>
               <a:rPr lang="en-US" sz="2400" b="1" dirty="0">
@@ -9897,29 +9754,7 @@
                   </a:schemeClr>
                 </a:solidFill>
               </a:rPr>
-              <a:t>In practice, many production systems use both together — </a:t>
-            </a:r>
-            <a:r>
-              <a:rPr lang="en-US" sz="2400" dirty="0" err="1">
-                <a:solidFill>
-                  <a:schemeClr val="accent6">
-                    <a:lumMod val="60000"/>
-                    <a:lumOff val="40000"/>
-                  </a:schemeClr>
-                </a:solidFill>
-              </a:rPr>
-              <a:t>LlamaIndex</a:t>
-            </a:r>
-            <a:r>
-              <a:rPr lang="en-US" sz="2400" dirty="0">
-                <a:solidFill>
-                  <a:schemeClr val="accent6">
-                    <a:lumMod val="60000"/>
-                    <a:lumOff val="40000"/>
-                  </a:schemeClr>
-                </a:solidFill>
-              </a:rPr>
-              <a:t> for the data layer and </a:t>
+              <a:t>In practice, many production systems use both together — LlamaIndex for the data layer and </a:t>
             </a:r>
             <a:r>
               <a:rPr lang="en-US" sz="2400" dirty="0" err="1">
